--- a/Week14/week14 natural language processing.pptx
+++ b/Week14/week14 natural language processing.pptx
@@ -267,7 +267,7 @@
           <a:p>
             <a:fld id="{D9D2A4DD-E6C5-4446-8814-DDCEAB64F4E0}" type="datetimeFigureOut">
               <a:rPr lang="ko-KR" altLang="en-US" smtClean="0"/>
-              <a:t>2023-06-05</a:t>
+              <a:t>2025-06-12</a:t>
             </a:fld>
             <a:endParaRPr lang="ko-KR" altLang="en-US"/>
           </a:p>
@@ -432,7 +432,7 @@
           <a:p>
             <a:fld id="{BF4D36B7-6BC9-4358-A9C9-63F4AFA82B46}" type="datetimeFigureOut">
               <a:rPr lang="ko-KR" altLang="en-US" smtClean="0"/>
-              <a:t>2023-06-05</a:t>
+              <a:t>2025-06-12</a:t>
             </a:fld>
             <a:endParaRPr lang="ko-KR" altLang="en-US"/>
           </a:p>
@@ -4526,7 +4526,7 @@
           <a:p>
             <a:fld id="{178ADFAC-D890-497A-A497-2A400DD02E74}" type="datetimeFigureOut">
               <a:rPr lang="ko-KR" altLang="en-US" smtClean="0"/>
-              <a:t>2023-06-05</a:t>
+              <a:t>2025-06-12</a:t>
             </a:fld>
             <a:endParaRPr lang="ko-KR" altLang="en-US"/>
           </a:p>
@@ -4696,7 +4696,7 @@
           <a:p>
             <a:fld id="{178ADFAC-D890-497A-A497-2A400DD02E74}" type="datetimeFigureOut">
               <a:rPr lang="ko-KR" altLang="en-US" smtClean="0"/>
-              <a:t>2023-06-05</a:t>
+              <a:t>2025-06-12</a:t>
             </a:fld>
             <a:endParaRPr lang="ko-KR" altLang="en-US"/>
           </a:p>
@@ -4876,7 +4876,7 @@
           <a:p>
             <a:fld id="{178ADFAC-D890-497A-A497-2A400DD02E74}" type="datetimeFigureOut">
               <a:rPr lang="ko-KR" altLang="en-US" smtClean="0"/>
-              <a:t>2023-06-05</a:t>
+              <a:t>2025-06-12</a:t>
             </a:fld>
             <a:endParaRPr lang="ko-KR" altLang="en-US"/>
           </a:p>
@@ -5046,7 +5046,7 @@
           <a:p>
             <a:fld id="{178ADFAC-D890-497A-A497-2A400DD02E74}" type="datetimeFigureOut">
               <a:rPr lang="ko-KR" altLang="en-US" smtClean="0"/>
-              <a:t>2023-06-05</a:t>
+              <a:t>2025-06-12</a:t>
             </a:fld>
             <a:endParaRPr lang="ko-KR" altLang="en-US"/>
           </a:p>
@@ -5290,7 +5290,7 @@
           <a:p>
             <a:fld id="{178ADFAC-D890-497A-A497-2A400DD02E74}" type="datetimeFigureOut">
               <a:rPr lang="ko-KR" altLang="en-US" smtClean="0"/>
-              <a:t>2023-06-05</a:t>
+              <a:t>2025-06-12</a:t>
             </a:fld>
             <a:endParaRPr lang="ko-KR" altLang="en-US"/>
           </a:p>
@@ -5522,7 +5522,7 @@
           <a:p>
             <a:fld id="{178ADFAC-D890-497A-A497-2A400DD02E74}" type="datetimeFigureOut">
               <a:rPr lang="ko-KR" altLang="en-US" smtClean="0"/>
-              <a:t>2023-06-05</a:t>
+              <a:t>2025-06-12</a:t>
             </a:fld>
             <a:endParaRPr lang="ko-KR" altLang="en-US"/>
           </a:p>
@@ -5889,7 +5889,7 @@
           <a:p>
             <a:fld id="{178ADFAC-D890-497A-A497-2A400DD02E74}" type="datetimeFigureOut">
               <a:rPr lang="ko-KR" altLang="en-US" smtClean="0"/>
-              <a:t>2023-06-05</a:t>
+              <a:t>2025-06-12</a:t>
             </a:fld>
             <a:endParaRPr lang="ko-KR" altLang="en-US"/>
           </a:p>
@@ -6007,7 +6007,7 @@
           <a:p>
             <a:fld id="{178ADFAC-D890-497A-A497-2A400DD02E74}" type="datetimeFigureOut">
               <a:rPr lang="ko-KR" altLang="en-US" smtClean="0"/>
-              <a:t>2023-06-05</a:t>
+              <a:t>2025-06-12</a:t>
             </a:fld>
             <a:endParaRPr lang="ko-KR" altLang="en-US"/>
           </a:p>
@@ -6102,7 +6102,7 @@
           <a:p>
             <a:fld id="{178ADFAC-D890-497A-A497-2A400DD02E74}" type="datetimeFigureOut">
               <a:rPr lang="ko-KR" altLang="en-US" smtClean="0"/>
-              <a:t>2023-06-05</a:t>
+              <a:t>2025-06-12</a:t>
             </a:fld>
             <a:endParaRPr lang="ko-KR" altLang="en-US"/>
           </a:p>
@@ -6379,7 +6379,7 @@
           <a:p>
             <a:fld id="{178ADFAC-D890-497A-A497-2A400DD02E74}" type="datetimeFigureOut">
               <a:rPr lang="ko-KR" altLang="en-US" smtClean="0"/>
-              <a:t>2023-06-05</a:t>
+              <a:t>2025-06-12</a:t>
             </a:fld>
             <a:endParaRPr lang="ko-KR" altLang="en-US"/>
           </a:p>
@@ -6636,7 +6636,7 @@
           <a:p>
             <a:fld id="{178ADFAC-D890-497A-A497-2A400DD02E74}" type="datetimeFigureOut">
               <a:rPr lang="ko-KR" altLang="en-US" smtClean="0"/>
-              <a:t>2023-06-05</a:t>
+              <a:t>2025-06-12</a:t>
             </a:fld>
             <a:endParaRPr lang="ko-KR" altLang="en-US"/>
           </a:p>
@@ -6849,7 +6849,7 @@
           <a:p>
             <a:fld id="{178ADFAC-D890-497A-A497-2A400DD02E74}" type="datetimeFigureOut">
               <a:rPr lang="ko-KR" altLang="en-US" smtClean="0"/>
-              <a:t>2023-06-05</a:t>
+              <a:t>2025-06-12</a:t>
             </a:fld>
             <a:endParaRPr lang="ko-KR" altLang="en-US"/>
           </a:p>
@@ -7373,7 +7373,7 @@
         <p:spPr>
           <a:xfrm>
             <a:off x="1075166" y="3978237"/>
-            <a:ext cx="6941127" cy="1384995"/>
+            <a:ext cx="6941127" cy="1314334"/>
           </a:xfrm>
           <a:prstGeom prst="rect">
             <a:avLst/>
@@ -7423,7 +7423,7 @@
                 <a:latin typeface="Arial Narrow" panose="020B0606020202030204" pitchFamily="34" charset="0"/>
                 <a:cs typeface="Times New Roman" panose="02020603050405020304" pitchFamily="18" charset="0"/>
               </a:rPr>
-              <a:t>Assistant professor </a:t>
+              <a:t>Associate professor </a:t>
             </a:r>
           </a:p>
         </p:txBody>
